--- a/CSIT5930_Search_Engine_New.pptx
+++ b/CSIT5930_Search_Engine_New.pptx
@@ -5,7 +5,7 @@
     <p:sldMasterId id="2147483648" r:id="rId1"/>
   </p:sldMasterIdLst>
   <p:notesMasterIdLst>
-    <p:notesMasterId r:id="rId20"/>
+    <p:notesMasterId r:id="rId21"/>
   </p:notesMasterIdLst>
   <p:sldIdLst>
     <p:sldId id="256" r:id="rId2"/>
@@ -24,8 +24,9 @@
     <p:sldId id="269" r:id="rId15"/>
     <p:sldId id="270" r:id="rId16"/>
     <p:sldId id="271" r:id="rId17"/>
-    <p:sldId id="272" r:id="rId18"/>
-    <p:sldId id="273" r:id="rId19"/>
+    <p:sldId id="274" r:id="rId18"/>
+    <p:sldId id="272" r:id="rId19"/>
+    <p:sldId id="273" r:id="rId20"/>
   </p:sldIdLst>
   <p:sldSz cx="9144000" cy="5143500" type="screen16x9"/>
   <p:notesSz cx="5143500" cy="9144000"/>
@@ -991,7 +992,7 @@
           <a:p>
             <a:fld id="{F7021451-1387-4CA6-816F-3879F97B5CBC}" type="slidenum">
               <a:rPr lang="en-US"/>
-              <a:t>17</a:t>
+              <a:t>18</a:t>
             </a:fld>
             <a:endParaRPr lang="en-US"/>
           </a:p>
@@ -1075,7 +1076,7 @@
           <a:p>
             <a:fld id="{F7021451-1387-4CA6-816F-3879F97B5CBC}" type="slidenum">
               <a:rPr lang="en-US"/>
-              <a:t>18</a:t>
+              <a:t>19</a:t>
             </a:fld>
             <a:endParaRPr lang="en-US"/>
           </a:p>
@@ -4994,7 +4995,7 @@
                 <a:ea typeface="Arial" pitchFamily="34" charset="-122"/>
                 <a:cs typeface="Arial" pitchFamily="34" charset="-120"/>
               </a:rPr>
-              <a:t>FRONTEND — SLIDE 1 OF 5</a:t>
+              <a:t>FRONTEND — SLIDE 1 OF 6</a:t>
             </a:r>
             <a:endParaRPr lang="en-US" sz="1000" dirty="0"/>
           </a:p>
@@ -5904,7 +5905,7 @@
                 <a:ea typeface="Arial" pitchFamily="34" charset="-122"/>
                 <a:cs typeface="Arial" pitchFamily="34" charset="-120"/>
               </a:rPr>
-              <a:t>FRONTEND — SLIDE 2 OF 5</a:t>
+              <a:t>FRONTEND — SLIDE 2 OF 6</a:t>
             </a:r>
             <a:endParaRPr lang="en-US" sz="1000" dirty="0"/>
           </a:p>
@@ -6902,7 +6903,7 @@
                 <a:ea typeface="Arial" pitchFamily="34" charset="-122"/>
                 <a:cs typeface="Arial" pitchFamily="34" charset="-120"/>
               </a:rPr>
-              <a:t>FRONTEND — SLIDE 3 OF 5</a:t>
+              <a:t>FRONTEND — SLIDE 3 OF 6</a:t>
             </a:r>
             <a:endParaRPr lang="en-US" sz="1000" dirty="0"/>
           </a:p>
@@ -7854,7 +7855,7 @@
                 <a:ea typeface="Arial" pitchFamily="34" charset="-122"/>
                 <a:cs typeface="Arial" pitchFamily="34" charset="-120"/>
               </a:rPr>
-              <a:t>FRONTEND — SLIDE 4 OF 5</a:t>
+              <a:t>FRONTEND — SLIDE 4 OF 6</a:t>
             </a:r>
             <a:endParaRPr lang="en-US" sz="1000" dirty="0"/>
           </a:p>
@@ -9338,7 +9339,7 @@
                 <a:ea typeface="Arial" pitchFamily="34" charset="-122"/>
                 <a:cs typeface="Arial" pitchFamily="34" charset="-120"/>
               </a:rPr>
-              <a:t>FRONTEND — SLIDE 5 OF 5</a:t>
+              <a:t>FRONTEND — SLIDE 5 OF 6</a:t>
             </a:r>
             <a:endParaRPr lang="en-US" sz="1000" dirty="0"/>
           </a:p>
@@ -9518,8 +9519,183 @@
         </p:nvSpPr>
         <p:spPr>
           <a:xfrm>
-            <a:off x="685800" y="2011680"/>
-            <a:ext cx="3566160" cy="1828800"/>
+            <a:off x="685800" y="2066544"/>
+            <a:ext cx="3566160" cy="2150276"/>
+          </a:xfrm>
+          <a:prstGeom prst="rect">
+            <a:avLst/>
+          </a:prstGeom>
+          <a:noFill/>
+          <a:ln/>
+        </p:spPr>
+        <p:txBody>
+          <a:bodyPr wrap="square" lIns="0" tIns="0" rIns="0" bIns="0" rtlCol="0" anchor="t"/>
+          <a:lstStyle/>
+          <a:p>
+            <a:pPr marL="0" indent="0">
+              <a:lnSpc>
+                <a:spcPct val="150000"/>
+              </a:lnSpc>
+              <a:spcAft>
+                <a:spcPts val="1000"/>
+              </a:spcAft>
+              <a:buNone/>
+            </a:pPr>
+            <a:r>
+              <a:rPr lang="en-US" sz="1100" dirty="0">
+                <a:solidFill>
+                  <a:srgbClr val="78716C"/>
+                </a:solidFill>
+                <a:latin typeface="Arial" pitchFamily="34" charset="0"/>
+                <a:ea typeface="Arial" pitchFamily="34" charset="-122"/>
+                <a:cs typeface="Arial" pitchFamily="34" charset="-120"/>
+              </a:rPr>
+              <a:t>Recent searches stored in browser localStorage</a:t>
+            </a:r>
+            <a:endParaRPr lang="en-US" sz="1100" dirty="0"/>
+          </a:p>
+          <a:p>
+            <a:pPr marL="0" indent="0">
+              <a:lnSpc>
+                <a:spcPct val="150000"/>
+              </a:lnSpc>
+              <a:spcAft>
+                <a:spcPts val="1000"/>
+              </a:spcAft>
+              <a:buNone/>
+            </a:pPr>
+            <a:r>
+              <a:rPr lang="en-US" sz="1100" dirty="0">
+                <a:solidFill>
+                  <a:srgbClr val="78716C"/>
+                </a:solidFill>
+                <a:latin typeface="Arial" pitchFamily="34" charset="0"/>
+                <a:ea typeface="Arial" pitchFamily="34" charset="-122"/>
+                <a:cs typeface="Arial" pitchFamily="34" charset="-120"/>
+              </a:rPr>
+              <a:t>Displayed on homepage below search box for quick re-access</a:t>
+            </a:r>
+            <a:endParaRPr lang="en-US" sz="1100" dirty="0"/>
+          </a:p>
+          <a:p>
+            <a:pPr marL="0" indent="0">
+              <a:lnSpc>
+                <a:spcPct val="150000"/>
+              </a:lnSpc>
+              <a:spcAft>
+                <a:spcPts val="1000"/>
+              </a:spcAft>
+              <a:buNone/>
+            </a:pPr>
+            <a:r>
+              <a:rPr lang="en-US" sz="1100" dirty="0">
+                <a:solidFill>
+                  <a:srgbClr val="78716C"/>
+                </a:solidFill>
+                <a:latin typeface="Arial" pitchFamily="34" charset="0"/>
+                <a:ea typeface="Arial" pitchFamily="34" charset="-122"/>
+                <a:cs typeface="Arial" pitchFamily="34" charset="-120"/>
+              </a:rPr>
+              <a:t>Up to N recent queries shown; oldest drop off automatically</a:t>
+            </a:r>
+            <a:endParaRPr lang="en-US" sz="1100" dirty="0"/>
+          </a:p>
+          <a:p>
+            <a:pPr marL="0" indent="0">
+              <a:lnSpc>
+                <a:spcPct val="150000"/>
+              </a:lnSpc>
+              <a:spcAft>
+                <a:spcPts val="1000"/>
+              </a:spcAft>
+              <a:buNone/>
+            </a:pPr>
+            <a:r>
+              <a:rPr lang="en-US" sz="1100" dirty="0">
+                <a:solidFill>
+                  <a:srgbClr val="78716C"/>
+                </a:solidFill>
+                <a:latin typeface="Arial" pitchFamily="34" charset="0"/>
+                <a:ea typeface="Arial" pitchFamily="34" charset="-122"/>
+                <a:cs typeface="Arial" pitchFamily="34" charset="-120"/>
+              </a:rPr>
+              <a:t>Persistent across browser sessions</a:t>
+            </a:r>
+            <a:endParaRPr lang="en-US" sz="1100" dirty="0"/>
+          </a:p>
+        </p:txBody>
+      </p:sp>
+      <p:sp>
+        <p:nvSpPr>
+          <p:cNvPr id="12" name="Shape 10"/>
+          <p:cNvSpPr/>
+          <p:nvPr/>
+        </p:nvSpPr>
+        <p:spPr>
+          <a:xfrm>
+            <a:off x="4709160" y="1417320"/>
+            <a:ext cx="3931920" cy="2926080"/>
+          </a:xfrm>
+          <a:prstGeom prst="rect">
+            <a:avLst/>
+          </a:prstGeom>
+          <a:solidFill>
+            <a:srgbClr val="FFFFFF"/>
+          </a:solidFill>
+          <a:ln/>
+          <a:effectLst>
+            <a:outerShdw blurRad="50800" dist="25400" dir="8100000" algn="bl" rotWithShape="0">
+              <a:srgbClr val="000000">
+                <a:alpha val="6000"/>
+              </a:srgbClr>
+            </a:outerShdw>
+          </a:effectLst>
+        </p:spPr>
+        <p:txBody>
+          <a:bodyPr/>
+          <a:lstStyle/>
+          <a:p>
+            <a:endParaRPr lang="zh-CN" altLang="en-US"/>
+          </a:p>
+        </p:txBody>
+      </p:sp>
+      <p:sp>
+        <p:nvSpPr>
+          <p:cNvPr id="13" name="Shape 11"/>
+          <p:cNvSpPr/>
+          <p:nvPr/>
+        </p:nvSpPr>
+        <p:spPr>
+          <a:xfrm>
+            <a:off x="4709160" y="1417320"/>
+            <a:ext cx="3931920" cy="54864"/>
+          </a:xfrm>
+          <a:prstGeom prst="rect">
+            <a:avLst/>
+          </a:prstGeom>
+          <a:solidFill>
+            <a:srgbClr val="0369A1"/>
+          </a:solidFill>
+          <a:ln/>
+        </p:spPr>
+        <p:txBody>
+          <a:bodyPr/>
+          <a:lstStyle/>
+          <a:p>
+            <a:endParaRPr lang="zh-CN" altLang="en-US"/>
+          </a:p>
+        </p:txBody>
+      </p:sp>
+      <p:sp>
+        <p:nvSpPr>
+          <p:cNvPr id="14" name="Text 12"/>
+          <p:cNvSpPr/>
+          <p:nvPr/>
+        </p:nvSpPr>
+        <p:spPr>
+          <a:xfrm>
+            <a:off x="5221224" y="1572768"/>
+            <a:ext cx="3236976" cy="274320"/>
           </a:xfrm>
           <a:prstGeom prst="rect">
             <a:avLst/>
@@ -9529,6 +9705,45 @@
         </p:spPr>
         <p:txBody>
           <a:bodyPr wrap="square" lIns="0" tIns="0" rIns="0" bIns="0" rtlCol="0" anchor="ctr"/>
+          <a:lstStyle/>
+          <a:p>
+            <a:pPr marL="0" indent="0">
+              <a:buNone/>
+            </a:pPr>
+            <a:r>
+              <a:rPr lang="en-US" sz="1400" b="1" dirty="0">
+                <a:solidFill>
+                  <a:srgbClr val="1E1E1E"/>
+                </a:solidFill>
+                <a:latin typeface="Arial" pitchFamily="34" charset="0"/>
+                <a:ea typeface="Arial" pitchFamily="34" charset="-122"/>
+                <a:cs typeface="Arial" pitchFamily="34" charset="-120"/>
+              </a:rPr>
+              <a:t>Privacy &amp; Simplicity</a:t>
+            </a:r>
+            <a:endParaRPr lang="en-US" sz="1400" dirty="0"/>
+          </a:p>
+        </p:txBody>
+      </p:sp>
+      <p:sp>
+        <p:nvSpPr>
+          <p:cNvPr id="15" name="Text 13"/>
+          <p:cNvSpPr/>
+          <p:nvPr/>
+        </p:nvSpPr>
+        <p:spPr>
+          <a:xfrm>
+            <a:off x="4892040" y="2011680"/>
+            <a:ext cx="3566160" cy="2043224"/>
+          </a:xfrm>
+          <a:prstGeom prst="rect">
+            <a:avLst/>
+          </a:prstGeom>
+          <a:noFill/>
+          <a:ln/>
+        </p:spPr>
+        <p:txBody>
+          <a:bodyPr wrap="square" lIns="0" tIns="0" rIns="0" bIns="0" rtlCol="0" anchor="t"/>
           <a:lstStyle/>
           <a:p>
             <a:pPr marL="0" indent="0">
@@ -9549,7 +9764,7 @@
                 <a:ea typeface="Arial" pitchFamily="34" charset="-122"/>
                 <a:cs typeface="Arial" pitchFamily="34" charset="-120"/>
               </a:rPr>
-              <a:t>Recent searches stored in browser localStorage</a:t>
+              <a:t>Client-side only — no server storage</a:t>
             </a:r>
             <a:endParaRPr lang="en-US" sz="1100" dirty="0"/>
           </a:p>
@@ -9572,7 +9787,7 @@
                 <a:ea typeface="Arial" pitchFamily="34" charset="-122"/>
                 <a:cs typeface="Arial" pitchFamily="34" charset="-120"/>
               </a:rPr>
-              <a:t>Displayed on homepage below search box for quick re-access</a:t>
+              <a:t>Respects user privacy by default</a:t>
             </a:r>
             <a:endParaRPr lang="en-US" sz="1100" dirty="0"/>
           </a:p>
@@ -9595,7 +9810,7 @@
                 <a:ea typeface="Arial" pitchFamily="34" charset="-122"/>
                 <a:cs typeface="Arial" pitchFamily="34" charset="-120"/>
               </a:rPr>
-              <a:t>Up to N recent queries shown; oldest drop off automatically</a:t>
+              <a:t>Quick re-access without retyping previous queries</a:t>
             </a:r>
             <a:endParaRPr lang="en-US" sz="1100" dirty="0"/>
           </a:p>
@@ -9618,356 +9833,6 @@
                 <a:ea typeface="Arial" pitchFamily="34" charset="-122"/>
                 <a:cs typeface="Arial" pitchFamily="34" charset="-120"/>
               </a:rPr>
-              <a:t>Persistent across browser sessions</a:t>
-            </a:r>
-            <a:endParaRPr lang="en-US" sz="1100" dirty="0"/>
-          </a:p>
-        </p:txBody>
-      </p:sp>
-      <p:sp>
-        <p:nvSpPr>
-          <p:cNvPr id="10" name="Shape 8"/>
-          <p:cNvSpPr/>
-          <p:nvPr/>
-        </p:nvSpPr>
-        <p:spPr>
-          <a:xfrm>
-            <a:off x="777240" y="2331720"/>
-            <a:ext cx="3200400" cy="1188720"/>
-          </a:xfrm>
-          <a:prstGeom prst="rect">
-            <a:avLst/>
-          </a:prstGeom>
-          <a:solidFill>
-            <a:srgbClr val="FFFFFF"/>
-          </a:solidFill>
-          <a:ln/>
-          <a:effectLst>
-            <a:outerShdw blurRad="50800" dist="25400" dir="8100000" algn="bl" rotWithShape="0">
-              <a:srgbClr val="000000">
-                <a:alpha val="6000"/>
-              </a:srgbClr>
-            </a:outerShdw>
-          </a:effectLst>
-        </p:spPr>
-        <p:txBody>
-          <a:bodyPr/>
-          <a:lstStyle/>
-          <a:p>
-            <a:endParaRPr lang="zh-CN" altLang="en-US"/>
-          </a:p>
-        </p:txBody>
-      </p:sp>
-      <p:sp>
-        <p:nvSpPr>
-          <p:cNvPr id="11" name="Text 9"/>
-          <p:cNvSpPr/>
-          <p:nvPr/>
-        </p:nvSpPr>
-        <p:spPr>
-          <a:xfrm>
-            <a:off x="960120" y="2423160"/>
-            <a:ext cx="2834640" cy="1097280"/>
-          </a:xfrm>
-          <a:prstGeom prst="rect">
-            <a:avLst/>
-          </a:prstGeom>
-          <a:noFill/>
-          <a:ln/>
-        </p:spPr>
-        <p:txBody>
-          <a:bodyPr wrap="square" lIns="0" tIns="0" rIns="0" bIns="0" rtlCol="0" anchor="ctr"/>
-          <a:lstStyle/>
-          <a:p>
-            <a:pPr marL="0" indent="0">
-              <a:lnSpc>
-                <a:spcPct val="150000"/>
-              </a:lnSpc>
-              <a:buNone/>
-            </a:pPr>
-            <a:r>
-              <a:rPr lang="en-US" sz="900" b="1" dirty="0">
-                <a:solidFill>
-                  <a:srgbClr val="78716C"/>
-                </a:solidFill>
-                <a:latin typeface="Arial" pitchFamily="34" charset="0"/>
-                <a:ea typeface="Arial" pitchFamily="34" charset="-122"/>
-                <a:cs typeface="Arial" pitchFamily="34" charset="-120"/>
-              </a:rPr>
-              <a:t>History</a:t>
-            </a:r>
-            <a:endParaRPr lang="en-US" sz="900" dirty="0"/>
-          </a:p>
-          <a:p>
-            <a:pPr marL="0" indent="0">
-              <a:lnSpc>
-                <a:spcPct val="150000"/>
-              </a:lnSpc>
-              <a:buNone/>
-            </a:pPr>
-            <a:r>
-              <a:rPr lang="en-US" sz="1000" dirty="0">
-                <a:solidFill>
-                  <a:srgbClr val="78716C"/>
-                </a:solidFill>
-                <a:latin typeface="Arial" pitchFamily="34" charset="0"/>
-                <a:ea typeface="Arial" pitchFamily="34" charset="-122"/>
-                <a:cs typeface="Arial" pitchFamily="34" charset="-120"/>
-              </a:rPr>
-              <a:t>"data mining" research</a:t>
-            </a:r>
-            <a:endParaRPr lang="en-US" sz="900" dirty="0"/>
-          </a:p>
-          <a:p>
-            <a:pPr marL="0" indent="0">
-              <a:lnSpc>
-                <a:spcPct val="150000"/>
-              </a:lnSpc>
-              <a:buNone/>
-            </a:pPr>
-            <a:r>
-              <a:rPr lang="en-US" sz="1000" dirty="0">
-                <a:solidFill>
-                  <a:srgbClr val="78716C"/>
-                </a:solidFill>
-                <a:latin typeface="Arial" pitchFamily="34" charset="0"/>
-                <a:ea typeface="Arial" pitchFamily="34" charset="-122"/>
-                <a:cs typeface="Arial" pitchFamily="34" charset="-120"/>
-              </a:rPr>
-              <a:t>"hong kong" university</a:t>
-            </a:r>
-            <a:endParaRPr lang="en-US" sz="900" dirty="0"/>
-          </a:p>
-          <a:p>
-            <a:pPr marL="0" indent="0">
-              <a:lnSpc>
-                <a:spcPct val="150000"/>
-              </a:lnSpc>
-              <a:buNone/>
-            </a:pPr>
-            <a:r>
-              <a:rPr lang="en-US" sz="1000" dirty="0">
-                <a:solidFill>
-                  <a:srgbClr val="78716C"/>
-                </a:solidFill>
-                <a:latin typeface="Arial" pitchFamily="34" charset="0"/>
-                <a:ea typeface="Arial" pitchFamily="34" charset="-122"/>
-                <a:cs typeface="Arial" pitchFamily="34" charset="-120"/>
-              </a:rPr>
-              <a:t>algorithm</a:t>
-            </a:r>
-            <a:endParaRPr lang="en-US" sz="900" dirty="0"/>
-          </a:p>
-        </p:txBody>
-      </p:sp>
-      <p:sp>
-        <p:nvSpPr>
-          <p:cNvPr id="12" name="Shape 10"/>
-          <p:cNvSpPr/>
-          <p:nvPr/>
-        </p:nvSpPr>
-        <p:spPr>
-          <a:xfrm>
-            <a:off x="4709160" y="1417320"/>
-            <a:ext cx="3931920" cy="2926080"/>
-          </a:xfrm>
-          <a:prstGeom prst="rect">
-            <a:avLst/>
-          </a:prstGeom>
-          <a:solidFill>
-            <a:srgbClr val="FFFFFF"/>
-          </a:solidFill>
-          <a:ln/>
-          <a:effectLst>
-            <a:outerShdw blurRad="50800" dist="25400" dir="8100000" algn="bl" rotWithShape="0">
-              <a:srgbClr val="000000">
-                <a:alpha val="6000"/>
-              </a:srgbClr>
-            </a:outerShdw>
-          </a:effectLst>
-        </p:spPr>
-        <p:txBody>
-          <a:bodyPr/>
-          <a:lstStyle/>
-          <a:p>
-            <a:endParaRPr lang="zh-CN" altLang="en-US"/>
-          </a:p>
-        </p:txBody>
-      </p:sp>
-      <p:sp>
-        <p:nvSpPr>
-          <p:cNvPr id="13" name="Shape 11"/>
-          <p:cNvSpPr/>
-          <p:nvPr/>
-        </p:nvSpPr>
-        <p:spPr>
-          <a:xfrm>
-            <a:off x="4709160" y="1417320"/>
-            <a:ext cx="3931920" cy="54864"/>
-          </a:xfrm>
-          <a:prstGeom prst="rect">
-            <a:avLst/>
-          </a:prstGeom>
-          <a:solidFill>
-            <a:srgbClr val="0369A1"/>
-          </a:solidFill>
-          <a:ln/>
-        </p:spPr>
-        <p:txBody>
-          <a:bodyPr/>
-          <a:lstStyle/>
-          <a:p>
-            <a:endParaRPr lang="zh-CN" altLang="en-US"/>
-          </a:p>
-        </p:txBody>
-      </p:sp>
-      <p:sp>
-        <p:nvSpPr>
-          <p:cNvPr id="14" name="Text 12"/>
-          <p:cNvSpPr/>
-          <p:nvPr/>
-        </p:nvSpPr>
-        <p:spPr>
-          <a:xfrm>
-            <a:off x="4892040" y="1572768"/>
-            <a:ext cx="3566160" cy="274320"/>
-          </a:xfrm>
-          <a:prstGeom prst="rect">
-            <a:avLst/>
-          </a:prstGeom>
-          <a:noFill/>
-          <a:ln/>
-        </p:spPr>
-        <p:txBody>
-          <a:bodyPr wrap="square" lIns="0" tIns="0" rIns="0" bIns="0" rtlCol="0" anchor="ctr"/>
-          <a:lstStyle/>
-          <a:p>
-            <a:pPr marL="0" indent="0">
-              <a:buNone/>
-            </a:pPr>
-            <a:r>
-              <a:rPr lang="en-US" sz="1400" b="1" dirty="0">
-                <a:solidFill>
-                  <a:srgbClr val="1E1E1E"/>
-                </a:solidFill>
-                <a:latin typeface="Arial" pitchFamily="34" charset="0"/>
-                <a:ea typeface="Arial" pitchFamily="34" charset="-122"/>
-                <a:cs typeface="Arial" pitchFamily="34" charset="-120"/>
-              </a:rPr>
-              <a:t>Privacy &amp; Simplicity</a:t>
-            </a:r>
-            <a:endParaRPr lang="en-US" sz="1400" dirty="0"/>
-          </a:p>
-        </p:txBody>
-      </p:sp>
-      <p:sp>
-        <p:nvSpPr>
-          <p:cNvPr id="15" name="Text 13"/>
-          <p:cNvSpPr/>
-          <p:nvPr/>
-        </p:nvSpPr>
-        <p:spPr>
-          <a:xfrm>
-            <a:off x="4892040" y="2011680"/>
-            <a:ext cx="3566160" cy="1645920"/>
-          </a:xfrm>
-          <a:prstGeom prst="rect">
-            <a:avLst/>
-          </a:prstGeom>
-          <a:noFill/>
-          <a:ln/>
-        </p:spPr>
-        <p:txBody>
-          <a:bodyPr wrap="square" lIns="0" tIns="0" rIns="0" bIns="0" rtlCol="0" anchor="ctr"/>
-          <a:lstStyle/>
-          <a:p>
-            <a:pPr marL="0" indent="0">
-              <a:lnSpc>
-                <a:spcPct val="200000"/>
-              </a:lnSpc>
-              <a:spcAft>
-                <a:spcPts val="1000"/>
-              </a:spcAft>
-              <a:buNone/>
-            </a:pPr>
-            <a:r>
-              <a:rPr lang="en-US" sz="1100" dirty="0">
-                <a:solidFill>
-                  <a:srgbClr val="78716C"/>
-                </a:solidFill>
-                <a:latin typeface="Arial" pitchFamily="34" charset="0"/>
-                <a:ea typeface="Arial" pitchFamily="34" charset="-122"/>
-                <a:cs typeface="Arial" pitchFamily="34" charset="-120"/>
-              </a:rPr>
-              <a:t>Client-side only — no server storage</a:t>
-            </a:r>
-            <a:endParaRPr lang="en-US" sz="1100" dirty="0"/>
-          </a:p>
-          <a:p>
-            <a:pPr marL="0" indent="0">
-              <a:lnSpc>
-                <a:spcPct val="200000"/>
-              </a:lnSpc>
-              <a:spcAft>
-                <a:spcPts val="1000"/>
-              </a:spcAft>
-              <a:buNone/>
-            </a:pPr>
-            <a:r>
-              <a:rPr lang="en-US" sz="1100" dirty="0">
-                <a:solidFill>
-                  <a:srgbClr val="78716C"/>
-                </a:solidFill>
-                <a:latin typeface="Arial" pitchFamily="34" charset="0"/>
-                <a:ea typeface="Arial" pitchFamily="34" charset="-122"/>
-                <a:cs typeface="Arial" pitchFamily="34" charset="-120"/>
-              </a:rPr>
-              <a:t>Respects user privacy by default</a:t>
-            </a:r>
-            <a:endParaRPr lang="en-US" sz="1100" dirty="0"/>
-          </a:p>
-          <a:p>
-            <a:pPr marL="0" indent="0">
-              <a:lnSpc>
-                <a:spcPct val="200000"/>
-              </a:lnSpc>
-              <a:spcAft>
-                <a:spcPts val="1000"/>
-              </a:spcAft>
-              <a:buNone/>
-            </a:pPr>
-            <a:r>
-              <a:rPr lang="en-US" sz="1100" dirty="0">
-                <a:solidFill>
-                  <a:srgbClr val="78716C"/>
-                </a:solidFill>
-                <a:latin typeface="Arial" pitchFamily="34" charset="0"/>
-                <a:ea typeface="Arial" pitchFamily="34" charset="-122"/>
-                <a:cs typeface="Arial" pitchFamily="34" charset="-120"/>
-              </a:rPr>
-              <a:t>Quick re-access without retyping previous queries</a:t>
-            </a:r>
-            <a:endParaRPr lang="en-US" sz="1100" dirty="0"/>
-          </a:p>
-          <a:p>
-            <a:pPr marL="0" indent="0">
-              <a:lnSpc>
-                <a:spcPct val="200000"/>
-              </a:lnSpc>
-              <a:spcAft>
-                <a:spcPts val="1000"/>
-              </a:spcAft>
-              <a:buNone/>
-            </a:pPr>
-            <a:r>
-              <a:rPr lang="en-US" sz="1100" dirty="0">
-                <a:solidFill>
-                  <a:srgbClr val="78716C"/>
-                </a:solidFill>
-                <a:latin typeface="Arial" pitchFamily="34" charset="0"/>
-                <a:ea typeface="Arial" pitchFamily="34" charset="-122"/>
-                <a:cs typeface="Arial" pitchFamily="34" charset="-120"/>
-              </a:rPr>
               <a:t>Zero backend dependency</a:t>
             </a:r>
             <a:endParaRPr lang="en-US" sz="1100" dirty="0"/>
@@ -10056,7 +9921,7 @@
         </p:blipFill>
         <p:spPr>
           <a:xfrm>
-            <a:off x="4864608" y="1481328"/>
+            <a:off x="4864608" y="1609344"/>
             <a:ext cx="201168" cy="201168"/>
           </a:xfrm>
           <a:prstGeom prst="rect">
@@ -10073,6 +9938,972 @@
 </file>
 
 <file path=ppt/slides/slide17.xml><?xml version="1.0" encoding="utf-8"?>
+<p:sld xmlns:a="http://schemas.openxmlformats.org/drawingml/2006/main" xmlns:r="http://schemas.openxmlformats.org/officeDocument/2006/relationships" xmlns:p="http://schemas.openxmlformats.org/presentationml/2006/main">
+  <p:cSld>
+    <p:spTree>
+      <p:nvGrpSpPr>
+        <p:cNvPr id="1" name=""/>
+        <p:cNvGrpSpPr/>
+        <p:nvPr/>
+      </p:nvGrpSpPr>
+      <p:grpSpPr>
+        <a:xfrm>
+          <a:off x="0" y="0"/>
+          <a:ext cx="0" cy="0"/>
+          <a:chOff x="0" y="0"/>
+          <a:chExt cx="0" cy="0"/>
+        </a:xfrm>
+      </p:grpSpPr>
+      <p:sp>
+        <p:nvSpPr>
+          <p:cNvPr id="2" name="Rectangle 1"/>
+          <p:cNvSpPr/>
+          <p:nvPr/>
+        </p:nvSpPr>
+        <p:spPr>
+          <a:xfrm>
+            <a:off x="0" y="0"/>
+            <a:ext cx="9144000" cy="36576"/>
+          </a:xfrm>
+          <a:prstGeom prst="rect">
+            <a:avLst/>
+          </a:prstGeom>
+          <a:solidFill>
+            <a:srgbClr val="0369A1"/>
+          </a:solidFill>
+          <a:ln>
+            <a:noFill/>
+          </a:ln>
+        </p:spPr>
+        <p:style>
+          <a:lnRef idx="1">
+            <a:schemeClr val="accent1"/>
+          </a:lnRef>
+          <a:fillRef idx="3">
+            <a:schemeClr val="accent1"/>
+          </a:fillRef>
+          <a:effectRef idx="2">
+            <a:schemeClr val="accent1"/>
+          </a:effectRef>
+          <a:fontRef idx="minor">
+            <a:schemeClr val="lt1"/>
+          </a:fontRef>
+        </p:style>
+        <p:txBody>
+          <a:bodyPr rtlCol="0" anchor="ctr"/>
+          <a:lstStyle/>
+          <a:p>
+            <a:pPr algn="ctr"/>
+            <a:endParaRPr/>
+          </a:p>
+        </p:txBody>
+      </p:sp>
+      <p:sp>
+        <p:nvSpPr>
+          <p:cNvPr id="3" name="TextBox 2"/>
+          <p:cNvSpPr txBox="1"/>
+          <p:nvPr/>
+        </p:nvSpPr>
+        <p:spPr>
+          <a:xfrm>
+            <a:off x="548640" y="320040"/>
+            <a:ext cx="8046720" cy="274320"/>
+          </a:xfrm>
+          <a:prstGeom prst="rect">
+            <a:avLst/>
+          </a:prstGeom>
+          <a:noFill/>
+        </p:spPr>
+        <p:txBody>
+          <a:bodyPr wrap="square">
+            <a:spAutoFit/>
+          </a:bodyPr>
+          <a:lstStyle/>
+          <a:p>
+            <a:pPr algn="l"/>
+            <a:r>
+              <a:rPr sz="1000" b="1">
+                <a:solidFill>
+                  <a:srgbClr val="78716C"/>
+                </a:solidFill>
+                <a:latin typeface="Arial"/>
+              </a:rPr>
+              <a:t>FRONTEND — SLIDE 6 OF 6</a:t>
+            </a:r>
+          </a:p>
+        </p:txBody>
+      </p:sp>
+      <p:sp>
+        <p:nvSpPr>
+          <p:cNvPr id="4" name="TextBox 3"/>
+          <p:cNvSpPr txBox="1"/>
+          <p:nvPr/>
+        </p:nvSpPr>
+        <p:spPr>
+          <a:xfrm>
+            <a:off x="548640" y="594360"/>
+            <a:ext cx="8046720" cy="502920"/>
+          </a:xfrm>
+          <a:prstGeom prst="rect">
+            <a:avLst/>
+          </a:prstGeom>
+          <a:noFill/>
+        </p:spPr>
+        <p:txBody>
+          <a:bodyPr wrap="square">
+            <a:spAutoFit/>
+          </a:bodyPr>
+          <a:lstStyle/>
+          <a:p>
+            <a:pPr algn="l"/>
+            <a:r>
+              <a:rPr sz="2800" b="1">
+                <a:solidFill>
+                  <a:srgbClr val="1E1E1E"/>
+                </a:solidFill>
+                <a:latin typeface="Arial"/>
+              </a:rPr>
+              <a:t>Enhancement — Keywords Table</a:t>
+            </a:r>
+          </a:p>
+        </p:txBody>
+      </p:sp>
+      <p:sp>
+        <p:nvSpPr>
+          <p:cNvPr id="5" name="Rectangle 4"/>
+          <p:cNvSpPr/>
+          <p:nvPr/>
+        </p:nvSpPr>
+        <p:spPr>
+          <a:xfrm>
+            <a:off x="548640" y="1115568"/>
+            <a:ext cx="1097280" cy="13716"/>
+          </a:xfrm>
+          <a:prstGeom prst="rect">
+            <a:avLst/>
+          </a:prstGeom>
+          <a:solidFill>
+            <a:srgbClr val="D97706"/>
+          </a:solidFill>
+          <a:ln>
+            <a:noFill/>
+          </a:ln>
+        </p:spPr>
+        <p:style>
+          <a:lnRef idx="1">
+            <a:schemeClr val="accent1"/>
+          </a:lnRef>
+          <a:fillRef idx="3">
+            <a:schemeClr val="accent1"/>
+          </a:fillRef>
+          <a:effectRef idx="2">
+            <a:schemeClr val="accent1"/>
+          </a:effectRef>
+          <a:fontRef idx="minor">
+            <a:schemeClr val="lt1"/>
+          </a:fontRef>
+        </p:style>
+        <p:txBody>
+          <a:bodyPr rtlCol="0" anchor="ctr"/>
+          <a:lstStyle/>
+          <a:p>
+            <a:pPr algn="ctr"/>
+            <a:endParaRPr/>
+          </a:p>
+        </p:txBody>
+      </p:sp>
+      <p:sp>
+        <p:nvSpPr>
+          <p:cNvPr id="6" name="Rectangle 5"/>
+          <p:cNvSpPr/>
+          <p:nvPr/>
+        </p:nvSpPr>
+        <p:spPr>
+          <a:xfrm>
+            <a:off x="502920" y="1417320"/>
+            <a:ext cx="3931920" cy="2926080"/>
+          </a:xfrm>
+          <a:prstGeom prst="rect">
+            <a:avLst/>
+          </a:prstGeom>
+          <a:solidFill>
+            <a:srgbClr val="FFFFFF"/>
+          </a:solidFill>
+          <a:ln>
+            <a:noFill/>
+          </a:ln>
+        </p:spPr>
+        <p:style>
+          <a:lnRef idx="1">
+            <a:schemeClr val="accent1"/>
+          </a:lnRef>
+          <a:fillRef idx="3">
+            <a:schemeClr val="accent1"/>
+          </a:fillRef>
+          <a:effectRef idx="2">
+            <a:schemeClr val="accent1"/>
+          </a:effectRef>
+          <a:fontRef idx="minor">
+            <a:schemeClr val="lt1"/>
+          </a:fontRef>
+        </p:style>
+        <p:txBody>
+          <a:bodyPr rtlCol="0" anchor="ctr"/>
+          <a:lstStyle/>
+          <a:p>
+            <a:pPr algn="ctr"/>
+            <a:endParaRPr/>
+          </a:p>
+        </p:txBody>
+      </p:sp>
+      <p:sp>
+        <p:nvSpPr>
+          <p:cNvPr id="7" name="Rectangle 6"/>
+          <p:cNvSpPr/>
+          <p:nvPr/>
+        </p:nvSpPr>
+        <p:spPr>
+          <a:xfrm>
+            <a:off x="502920" y="1417320"/>
+            <a:ext cx="3931920" cy="54864"/>
+          </a:xfrm>
+          <a:prstGeom prst="rect">
+            <a:avLst/>
+          </a:prstGeom>
+          <a:solidFill>
+            <a:srgbClr val="D97706"/>
+          </a:solidFill>
+          <a:ln>
+            <a:noFill/>
+          </a:ln>
+        </p:spPr>
+        <p:style>
+          <a:lnRef idx="1">
+            <a:schemeClr val="accent1"/>
+          </a:lnRef>
+          <a:fillRef idx="3">
+            <a:schemeClr val="accent1"/>
+          </a:fillRef>
+          <a:effectRef idx="2">
+            <a:schemeClr val="accent1"/>
+          </a:effectRef>
+          <a:fontRef idx="minor">
+            <a:schemeClr val="lt1"/>
+          </a:fontRef>
+        </p:style>
+        <p:txBody>
+          <a:bodyPr rtlCol="0" anchor="ctr"/>
+          <a:lstStyle/>
+          <a:p>
+            <a:pPr algn="ctr"/>
+            <a:endParaRPr/>
+          </a:p>
+        </p:txBody>
+      </p:sp>
+      <p:pic>
+        <p:nvPicPr>
+          <p:cNvPr id="8" name="Picture 7" descr="image.png"/>
+          <p:cNvPicPr>
+            <a:picLocks noChangeAspect="1"/>
+          </p:cNvPicPr>
+          <p:nvPr/>
+        </p:nvPicPr>
+        <p:blipFill>
+          <a:blip r:embed="rId2"/>
+          <a:stretch>
+            <a:fillRect/>
+          </a:stretch>
+        </p:blipFill>
+        <p:spPr>
+          <a:xfrm>
+            <a:off x="676656" y="1627632"/>
+            <a:ext cx="201168" cy="201168"/>
+          </a:xfrm>
+          <a:prstGeom prst="rect">
+            <a:avLst/>
+          </a:prstGeom>
+        </p:spPr>
+      </p:pic>
+      <p:sp>
+        <p:nvSpPr>
+          <p:cNvPr id="9" name="TextBox 8"/>
+          <p:cNvSpPr txBox="1"/>
+          <p:nvPr/>
+        </p:nvSpPr>
+        <p:spPr>
+          <a:xfrm>
+            <a:off x="960120" y="1600200"/>
+            <a:ext cx="3291840" cy="274320"/>
+          </a:xfrm>
+          <a:prstGeom prst="rect">
+            <a:avLst/>
+          </a:prstGeom>
+          <a:noFill/>
+        </p:spPr>
+        <p:txBody>
+          <a:bodyPr wrap="square">
+            <a:spAutoFit/>
+          </a:bodyPr>
+          <a:lstStyle/>
+          <a:p>
+            <a:pPr algn="l"/>
+            <a:r>
+              <a:rPr sz="1400" b="1">
+                <a:solidFill>
+                  <a:srgbClr val="1E1E1E"/>
+                </a:solidFill>
+                <a:latin typeface="Arial"/>
+              </a:rPr>
+              <a:t>Interactive Keywords Table</a:t>
+            </a:r>
+          </a:p>
+        </p:txBody>
+      </p:sp>
+      <p:sp>
+        <p:nvSpPr>
+          <p:cNvPr id="10" name="TextBox 9"/>
+          <p:cNvSpPr txBox="1"/>
+          <p:nvPr/>
+        </p:nvSpPr>
+        <p:spPr>
+          <a:xfrm>
+            <a:off x="502920" y="2057400"/>
+            <a:ext cx="3931920" cy="1747786"/>
+          </a:xfrm>
+          <a:prstGeom prst="rect">
+            <a:avLst/>
+          </a:prstGeom>
+          <a:noFill/>
+        </p:spPr>
+        <p:txBody>
+          <a:bodyPr wrap="square">
+            <a:spAutoFit/>
+          </a:bodyPr>
+          <a:lstStyle/>
+          <a:p>
+            <a:pPr marL="171450" indent="-171450" algn="l">
+              <a:lnSpc>
+                <a:spcPct val="130000"/>
+              </a:lnSpc>
+              <a:buFont typeface="Arial" panose="020B0604020202020204" pitchFamily="34" charset="0"/>
+              <a:buChar char="•"/>
+            </a:pPr>
+            <a:r>
+              <a:rPr sz="1200" b="0" dirty="0">
+                <a:solidFill>
+                  <a:srgbClr val="1E1E1E"/>
+                </a:solidFill>
+                <a:latin typeface="Arial"/>
+              </a:rPr>
+              <a:t>Browse all indexed keywords in a paginated, sortable table</a:t>
+            </a:r>
+          </a:p>
+          <a:p>
+            <a:pPr marL="171450" indent="-171450" algn="l">
+              <a:lnSpc>
+                <a:spcPct val="130000"/>
+              </a:lnSpc>
+              <a:buFont typeface="Arial" panose="020B0604020202020204" pitchFamily="34" charset="0"/>
+              <a:buChar char="•"/>
+            </a:pPr>
+            <a:r>
+              <a:rPr sz="1200" b="0" dirty="0">
+                <a:solidFill>
+                  <a:srgbClr val="1E1E1E"/>
+                </a:solidFill>
+                <a:latin typeface="Arial"/>
+              </a:rPr>
+              <a:t>Each row shows term, TF, DF, and posting count</a:t>
+            </a:r>
+          </a:p>
+          <a:p>
+            <a:pPr marL="171450" indent="-171450" algn="l">
+              <a:lnSpc>
+                <a:spcPct val="130000"/>
+              </a:lnSpc>
+              <a:buFont typeface="Arial" panose="020B0604020202020204" pitchFamily="34" charset="0"/>
+              <a:buChar char="•"/>
+            </a:pPr>
+            <a:r>
+              <a:rPr sz="1200" b="0" dirty="0">
+                <a:solidFill>
+                  <a:srgbClr val="1E1E1E"/>
+                </a:solidFill>
+                <a:latin typeface="Arial"/>
+              </a:rPr>
+              <a:t>Click any keyword to instantly search for it via GET parameter</a:t>
+            </a:r>
+          </a:p>
+          <a:p>
+            <a:pPr marL="171450" indent="-171450" algn="l">
+              <a:lnSpc>
+                <a:spcPct val="130000"/>
+              </a:lnSpc>
+              <a:buFont typeface="Arial" panose="020B0604020202020204" pitchFamily="34" charset="0"/>
+              <a:buChar char="•"/>
+            </a:pPr>
+            <a:r>
+              <a:rPr sz="1200" b="0" dirty="0">
+                <a:solidFill>
+                  <a:srgbClr val="1E1E1E"/>
+                </a:solidFill>
+                <a:latin typeface="Arial"/>
+              </a:rPr>
+              <a:t>Transparent view into what the engine has indexed</a:t>
+            </a:r>
+          </a:p>
+          <a:p>
+            <a:pPr marL="171450" indent="-171450" algn="l">
+              <a:lnSpc>
+                <a:spcPct val="130000"/>
+              </a:lnSpc>
+              <a:buFont typeface="Arial" panose="020B0604020202020204" pitchFamily="34" charset="0"/>
+              <a:buChar char="•"/>
+            </a:pPr>
+            <a:r>
+              <a:rPr sz="1200" b="0" dirty="0">
+                <a:solidFill>
+                  <a:srgbClr val="1E1E1E"/>
+                </a:solidFill>
+                <a:latin typeface="Arial"/>
+              </a:rPr>
+              <a:t>Helps users discover available search vocabulary</a:t>
+            </a:r>
+          </a:p>
+        </p:txBody>
+      </p:sp>
+      <p:sp>
+        <p:nvSpPr>
+          <p:cNvPr id="11" name="Rectangle 10"/>
+          <p:cNvSpPr/>
+          <p:nvPr/>
+        </p:nvSpPr>
+        <p:spPr>
+          <a:xfrm>
+            <a:off x="4709160" y="1417320"/>
+            <a:ext cx="3931920" cy="2926080"/>
+          </a:xfrm>
+          <a:prstGeom prst="rect">
+            <a:avLst/>
+          </a:prstGeom>
+          <a:solidFill>
+            <a:srgbClr val="FFFFFF"/>
+          </a:solidFill>
+          <a:ln>
+            <a:noFill/>
+          </a:ln>
+        </p:spPr>
+        <p:style>
+          <a:lnRef idx="1">
+            <a:schemeClr val="accent1"/>
+          </a:lnRef>
+          <a:fillRef idx="3">
+            <a:schemeClr val="accent1"/>
+          </a:fillRef>
+          <a:effectRef idx="2">
+            <a:schemeClr val="accent1"/>
+          </a:effectRef>
+          <a:fontRef idx="minor">
+            <a:schemeClr val="lt1"/>
+          </a:fontRef>
+        </p:style>
+        <p:txBody>
+          <a:bodyPr rtlCol="0" anchor="ctr"/>
+          <a:lstStyle/>
+          <a:p>
+            <a:pPr algn="ctr"/>
+            <a:endParaRPr/>
+          </a:p>
+        </p:txBody>
+      </p:sp>
+      <p:sp>
+        <p:nvSpPr>
+          <p:cNvPr id="12" name="Rectangle 11"/>
+          <p:cNvSpPr/>
+          <p:nvPr/>
+        </p:nvSpPr>
+        <p:spPr>
+          <a:xfrm>
+            <a:off x="4709160" y="1417320"/>
+            <a:ext cx="3931920" cy="54864"/>
+          </a:xfrm>
+          <a:prstGeom prst="rect">
+            <a:avLst/>
+          </a:prstGeom>
+          <a:solidFill>
+            <a:srgbClr val="0369A1"/>
+          </a:solidFill>
+          <a:ln>
+            <a:noFill/>
+          </a:ln>
+        </p:spPr>
+        <p:style>
+          <a:lnRef idx="1">
+            <a:schemeClr val="accent1"/>
+          </a:lnRef>
+          <a:fillRef idx="3">
+            <a:schemeClr val="accent1"/>
+          </a:fillRef>
+          <a:effectRef idx="2">
+            <a:schemeClr val="accent1"/>
+          </a:effectRef>
+          <a:fontRef idx="minor">
+            <a:schemeClr val="lt1"/>
+          </a:fontRef>
+        </p:style>
+        <p:txBody>
+          <a:bodyPr rtlCol="0" anchor="ctr"/>
+          <a:lstStyle/>
+          <a:p>
+            <a:pPr algn="ctr"/>
+            <a:endParaRPr/>
+          </a:p>
+        </p:txBody>
+      </p:sp>
+      <p:pic>
+        <p:nvPicPr>
+          <p:cNvPr id="13" name="Picture 12" descr="image.png"/>
+          <p:cNvPicPr>
+            <a:picLocks noChangeAspect="1"/>
+          </p:cNvPicPr>
+          <p:nvPr/>
+        </p:nvPicPr>
+        <p:blipFill>
+          <a:blip r:embed="rId3"/>
+          <a:stretch>
+            <a:fillRect/>
+          </a:stretch>
+        </p:blipFill>
+        <p:spPr>
+          <a:xfrm>
+            <a:off x="4882896" y="1627632"/>
+            <a:ext cx="201168" cy="201168"/>
+          </a:xfrm>
+          <a:prstGeom prst="rect">
+            <a:avLst/>
+          </a:prstGeom>
+        </p:spPr>
+      </p:pic>
+      <p:sp>
+        <p:nvSpPr>
+          <p:cNvPr id="14" name="TextBox 13"/>
+          <p:cNvSpPr txBox="1"/>
+          <p:nvPr/>
+        </p:nvSpPr>
+        <p:spPr>
+          <a:xfrm>
+            <a:off x="5166360" y="1600200"/>
+            <a:ext cx="3291840" cy="274320"/>
+          </a:xfrm>
+          <a:prstGeom prst="rect">
+            <a:avLst/>
+          </a:prstGeom>
+          <a:noFill/>
+        </p:spPr>
+        <p:txBody>
+          <a:bodyPr wrap="square">
+            <a:spAutoFit/>
+          </a:bodyPr>
+          <a:lstStyle/>
+          <a:p>
+            <a:pPr algn="l"/>
+            <a:r>
+              <a:rPr sz="1400" b="1">
+                <a:solidFill>
+                  <a:srgbClr val="1E1E1E"/>
+                </a:solidFill>
+                <a:latin typeface="Arial"/>
+              </a:rPr>
+              <a:t>Implementation</a:t>
+            </a:r>
+          </a:p>
+        </p:txBody>
+      </p:sp>
+      <p:sp>
+        <p:nvSpPr>
+          <p:cNvPr id="15" name="TextBox 14"/>
+          <p:cNvSpPr txBox="1"/>
+          <p:nvPr/>
+        </p:nvSpPr>
+        <p:spPr>
+          <a:xfrm>
+            <a:off x="4813825" y="2057400"/>
+            <a:ext cx="3827255" cy="1747786"/>
+          </a:xfrm>
+          <a:prstGeom prst="rect">
+            <a:avLst/>
+          </a:prstGeom>
+          <a:noFill/>
+        </p:spPr>
+        <p:txBody>
+          <a:bodyPr wrap="square">
+            <a:spAutoFit/>
+          </a:bodyPr>
+          <a:lstStyle/>
+          <a:p>
+            <a:pPr marL="171450" indent="-171450" algn="l">
+              <a:lnSpc>
+                <a:spcPct val="130000"/>
+              </a:lnSpc>
+              <a:buFont typeface="Arial" panose="020B0604020202020204" pitchFamily="34" charset="0"/>
+              <a:buChar char="•"/>
+            </a:pPr>
+            <a:r>
+              <a:rPr sz="1200" b="0" dirty="0">
+                <a:solidFill>
+                  <a:srgbClr val="1E1E1E"/>
+                </a:solidFill>
+                <a:latin typeface="Arial"/>
+              </a:rPr>
+              <a:t>Reads all keys from </a:t>
+            </a:r>
+            <a:r>
+              <a:rPr sz="1200" b="0" dirty="0" err="1">
+                <a:solidFill>
+                  <a:srgbClr val="1E1E1E"/>
+                </a:solidFill>
+                <a:latin typeface="Arial"/>
+              </a:rPr>
+              <a:t>titleIndex</a:t>
+            </a:r>
+            <a:r>
+              <a:rPr sz="1200" b="0" dirty="0">
+                <a:solidFill>
+                  <a:srgbClr val="1E1E1E"/>
+                </a:solidFill>
+                <a:latin typeface="Arial"/>
+              </a:rPr>
+              <a:t> &amp; </a:t>
+            </a:r>
+            <a:r>
+              <a:rPr sz="1200" b="0" dirty="0" err="1">
+                <a:solidFill>
+                  <a:srgbClr val="1E1E1E"/>
+                </a:solidFill>
+                <a:latin typeface="Arial"/>
+              </a:rPr>
+              <a:t>bodyIndex</a:t>
+            </a:r>
+            <a:r>
+              <a:rPr sz="1200" b="0" dirty="0">
+                <a:solidFill>
+                  <a:srgbClr val="1E1E1E"/>
+                </a:solidFill>
+                <a:latin typeface="Arial"/>
+              </a:rPr>
+              <a:t> JDBM </a:t>
+            </a:r>
+            <a:r>
+              <a:rPr sz="1200" b="0" dirty="0" err="1">
+                <a:solidFill>
+                  <a:srgbClr val="1E1E1E"/>
+                </a:solidFill>
+                <a:latin typeface="Arial"/>
+              </a:rPr>
+              <a:t>HTrees</a:t>
+            </a:r>
+            <a:endParaRPr sz="1200" b="0" dirty="0">
+              <a:solidFill>
+                <a:srgbClr val="1E1E1E"/>
+              </a:solidFill>
+              <a:latin typeface="Arial"/>
+            </a:endParaRPr>
+          </a:p>
+          <a:p>
+            <a:pPr marL="171450" indent="-171450" algn="l">
+              <a:lnSpc>
+                <a:spcPct val="130000"/>
+              </a:lnSpc>
+              <a:buFont typeface="Arial" panose="020B0604020202020204" pitchFamily="34" charset="0"/>
+              <a:buChar char="•"/>
+            </a:pPr>
+            <a:r>
+              <a:rPr sz="1200" b="0" dirty="0">
+                <a:solidFill>
+                  <a:srgbClr val="1E1E1E"/>
+                </a:solidFill>
+                <a:latin typeface="Arial"/>
+              </a:rPr>
+              <a:t>Computes TF/DF from </a:t>
+            </a:r>
+            <a:r>
+              <a:rPr sz="1200" b="0" dirty="0" err="1">
+                <a:solidFill>
+                  <a:srgbClr val="1E1E1E"/>
+                </a:solidFill>
+                <a:latin typeface="Arial"/>
+              </a:rPr>
+              <a:t>PostingList</a:t>
+            </a:r>
+            <a:r>
+              <a:rPr sz="1200" b="0" dirty="0">
+                <a:solidFill>
+                  <a:srgbClr val="1E1E1E"/>
+                </a:solidFill>
+                <a:latin typeface="Arial"/>
+              </a:rPr>
+              <a:t> sizes at request time</a:t>
+            </a:r>
+          </a:p>
+          <a:p>
+            <a:pPr marL="171450" indent="-171450" algn="l">
+              <a:lnSpc>
+                <a:spcPct val="130000"/>
+              </a:lnSpc>
+              <a:buFont typeface="Arial" panose="020B0604020202020204" pitchFamily="34" charset="0"/>
+              <a:buChar char="•"/>
+            </a:pPr>
+            <a:r>
+              <a:rPr sz="1200" b="0" dirty="0">
+                <a:solidFill>
+                  <a:srgbClr val="1E1E1E"/>
+                </a:solidFill>
+                <a:latin typeface="Arial"/>
+              </a:rPr>
+              <a:t>JSP renders as a sortable, paginated HTML table</a:t>
+            </a:r>
+          </a:p>
+          <a:p>
+            <a:pPr marL="171450" indent="-171450" algn="l">
+              <a:lnSpc>
+                <a:spcPct val="130000"/>
+              </a:lnSpc>
+              <a:buFont typeface="Arial" panose="020B0604020202020204" pitchFamily="34" charset="0"/>
+              <a:buChar char="•"/>
+            </a:pPr>
+            <a:r>
+              <a:rPr sz="1200" b="0" dirty="0">
+                <a:solidFill>
+                  <a:srgbClr val="1E1E1E"/>
+                </a:solidFill>
+                <a:latin typeface="Arial"/>
+              </a:rPr>
+              <a:t>Zero extra storage — queries live inverted indexes</a:t>
+            </a:r>
+          </a:p>
+          <a:p>
+            <a:pPr marL="171450" indent="-171450" algn="l">
+              <a:lnSpc>
+                <a:spcPct val="130000"/>
+              </a:lnSpc>
+              <a:buFont typeface="Arial" panose="020B0604020202020204" pitchFamily="34" charset="0"/>
+              <a:buChar char="•"/>
+            </a:pPr>
+            <a:r>
+              <a:rPr sz="1200" b="0" dirty="0">
+                <a:solidFill>
+                  <a:srgbClr val="1E1E1E"/>
+                </a:solidFill>
+                <a:latin typeface="Arial"/>
+              </a:rPr>
+              <a:t>New </a:t>
+            </a:r>
+            <a:r>
+              <a:rPr sz="1200" b="0" dirty="0" err="1">
+                <a:solidFill>
+                  <a:srgbClr val="1E1E1E"/>
+                </a:solidFill>
+                <a:latin typeface="Arial"/>
+              </a:rPr>
+              <a:t>KeywordServlet</a:t>
+            </a:r>
+            <a:r>
+              <a:rPr sz="1200" b="0" dirty="0">
+                <a:solidFill>
+                  <a:srgbClr val="1E1E1E"/>
+                </a:solidFill>
+                <a:latin typeface="Arial"/>
+              </a:rPr>
+              <a:t> handles listing &amp; term lookup</a:t>
+            </a:r>
+          </a:p>
+        </p:txBody>
+      </p:sp>
+      <p:sp>
+        <p:nvSpPr>
+          <p:cNvPr id="16" name="Rectangle 15"/>
+          <p:cNvSpPr/>
+          <p:nvPr/>
+        </p:nvSpPr>
+        <p:spPr>
+          <a:xfrm>
+            <a:off x="502920" y="4617720"/>
+            <a:ext cx="8138160" cy="384048"/>
+          </a:xfrm>
+          <a:prstGeom prst="rect">
+            <a:avLst/>
+          </a:prstGeom>
+          <a:solidFill>
+            <a:srgbClr val="F8F8F8"/>
+          </a:solidFill>
+          <a:ln>
+            <a:noFill/>
+          </a:ln>
+        </p:spPr>
+        <p:style>
+          <a:lnRef idx="1">
+            <a:schemeClr val="accent1"/>
+          </a:lnRef>
+          <a:fillRef idx="3">
+            <a:schemeClr val="accent1"/>
+          </a:fillRef>
+          <a:effectRef idx="2">
+            <a:schemeClr val="accent1"/>
+          </a:effectRef>
+          <a:fontRef idx="minor">
+            <a:schemeClr val="lt1"/>
+          </a:fontRef>
+        </p:style>
+        <p:txBody>
+          <a:bodyPr rtlCol="0" anchor="ctr"/>
+          <a:lstStyle/>
+          <a:p>
+            <a:pPr algn="ctr"/>
+            <a:endParaRPr/>
+          </a:p>
+        </p:txBody>
+      </p:sp>
+      <p:sp>
+        <p:nvSpPr>
+          <p:cNvPr id="17" name="Rectangle 16"/>
+          <p:cNvSpPr/>
+          <p:nvPr/>
+        </p:nvSpPr>
+        <p:spPr>
+          <a:xfrm>
+            <a:off x="502920" y="4617720"/>
+            <a:ext cx="68580" cy="384048"/>
+          </a:xfrm>
+          <a:prstGeom prst="rect">
+            <a:avLst/>
+          </a:prstGeom>
+          <a:solidFill>
+            <a:srgbClr val="D97706"/>
+          </a:solidFill>
+          <a:ln>
+            <a:noFill/>
+          </a:ln>
+        </p:spPr>
+        <p:style>
+          <a:lnRef idx="1">
+            <a:schemeClr val="accent1"/>
+          </a:lnRef>
+          <a:fillRef idx="3">
+            <a:schemeClr val="accent1"/>
+          </a:fillRef>
+          <a:effectRef idx="2">
+            <a:schemeClr val="accent1"/>
+          </a:effectRef>
+          <a:fontRef idx="minor">
+            <a:schemeClr val="lt1"/>
+          </a:fontRef>
+        </p:style>
+        <p:txBody>
+          <a:bodyPr rtlCol="0" anchor="ctr"/>
+          <a:lstStyle/>
+          <a:p>
+            <a:pPr algn="ctr"/>
+            <a:endParaRPr/>
+          </a:p>
+        </p:txBody>
+      </p:sp>
+      <p:sp>
+        <p:nvSpPr>
+          <p:cNvPr id="18" name="TextBox 17"/>
+          <p:cNvSpPr txBox="1"/>
+          <p:nvPr/>
+        </p:nvSpPr>
+        <p:spPr>
+          <a:xfrm>
+            <a:off x="571500" y="4649724"/>
+            <a:ext cx="7795260" cy="230832"/>
+          </a:xfrm>
+          <a:prstGeom prst="rect">
+            <a:avLst/>
+          </a:prstGeom>
+          <a:noFill/>
+        </p:spPr>
+        <p:txBody>
+          <a:bodyPr wrap="square">
+            <a:spAutoFit/>
+          </a:bodyPr>
+          <a:lstStyle/>
+          <a:p>
+            <a:pPr algn="l"/>
+            <a:r>
+              <a:rPr sz="900" b="1" dirty="0">
+                <a:solidFill>
+                  <a:srgbClr val="D97706"/>
+                </a:solidFill>
+                <a:latin typeface="Arial"/>
+              </a:rPr>
+              <a:t>Keywords Table Servlet</a:t>
+            </a:r>
+          </a:p>
+        </p:txBody>
+      </p:sp>
+      <p:sp>
+        <p:nvSpPr>
+          <p:cNvPr id="19" name="TextBox 18"/>
+          <p:cNvSpPr txBox="1"/>
+          <p:nvPr/>
+        </p:nvSpPr>
+        <p:spPr>
+          <a:xfrm>
+            <a:off x="571500" y="4805172"/>
+            <a:ext cx="7795260" cy="215444"/>
+          </a:xfrm>
+          <a:prstGeom prst="rect">
+            <a:avLst/>
+          </a:prstGeom>
+          <a:noFill/>
+        </p:spPr>
+        <p:txBody>
+          <a:bodyPr wrap="square">
+            <a:spAutoFit/>
+          </a:bodyPr>
+          <a:lstStyle/>
+          <a:p>
+            <a:pPr algn="l"/>
+            <a:r>
+              <a:rPr sz="800" b="0" dirty="0">
+                <a:solidFill>
+                  <a:srgbClr val="78716C"/>
+                </a:solidFill>
+                <a:latin typeface="Arial"/>
+              </a:rPr>
+              <a:t>All data read live from existing inverted indexes — no extra storage, pre-computation, or maintenance overhead. Keyword click passes term to </a:t>
+            </a:r>
+            <a:r>
+              <a:rPr sz="800" b="0" dirty="0" err="1">
+                <a:solidFill>
+                  <a:srgbClr val="78716C"/>
+                </a:solidFill>
+                <a:latin typeface="Arial"/>
+              </a:rPr>
+              <a:t>SearchServlet</a:t>
+            </a:r>
+            <a:r>
+              <a:rPr sz="800" b="0" dirty="0">
+                <a:solidFill>
+                  <a:srgbClr val="78716C"/>
+                </a:solidFill>
+                <a:latin typeface="Arial"/>
+              </a:rPr>
+              <a:t> via GET.</a:t>
+            </a:r>
+          </a:p>
+        </p:txBody>
+      </p:sp>
+    </p:spTree>
+  </p:cSld>
+  <p:clrMapOvr>
+    <a:masterClrMapping/>
+  </p:clrMapOvr>
+</p:sld>
+</file>
+
+<file path=ppt/slides/slide18.xml><?xml version="1.0" encoding="utf-8"?>
 <p:sld xmlns:a="http://schemas.openxmlformats.org/drawingml/2006/main" xmlns:r="http://schemas.openxmlformats.org/officeDocument/2006/relationships" xmlns:p="http://schemas.openxmlformats.org/presentationml/2006/main">
   <p:cSld name="Slide 17">
     <p:bg>
@@ -11290,7 +12121,7 @@
 </p:sld>
 </file>
 
-<file path=ppt/slides/slide18.xml><?xml version="1.0" encoding="utf-8"?>
+<file path=ppt/slides/slide19.xml><?xml version="1.0" encoding="utf-8"?>
 <p:sld xmlns:a="http://schemas.openxmlformats.org/drawingml/2006/main" xmlns:r="http://schemas.openxmlformats.org/officeDocument/2006/relationships" xmlns:p="http://schemas.openxmlformats.org/presentationml/2006/main">
   <p:cSld name="Slide 18">
     <p:bg>
